--- a/Seasonal_Agriculture_Performance_Analysis_PPT.pptx
+++ b/Seasonal_Agriculture_Performance_Analysis_PPT.pptx
@@ -13022,7 +13022,7 @@
         <p:spPr>
           <a:xfrm>
             <a:off x="729256" y="1440320"/>
-            <a:ext cx="7232875" cy="646331"/>
+            <a:ext cx="7232875" cy="645160"/>
           </a:xfrm>
           <a:prstGeom prst="rect">
             <a:avLst/>
@@ -13036,10 +13036,52 @@
           <a:lstStyle/>
           <a:p>
             <a:r>
-              <a:rPr lang="en-US" dirty="0"/>
-              <a:t>https://github.com/YOUR-GITHUB-USERNAME/Seasonal-Agriculture-Performance-Analysis</a:t>
+              <a:rPr lang="en-US" altLang="en-US" dirty="0">
+                <a:gradFill>
+                  <a:gsLst>
+                    <a:gs pos="50000">
+                      <a:schemeClr val="tx1"/>
+                    </a:gs>
+                    <a:gs pos="0">
+                      <a:schemeClr val="tx1">
+                        <a:lumMod val="25000"/>
+                        <a:lumOff val="75000"/>
+                      </a:schemeClr>
+                    </a:gs>
+                    <a:gs pos="100000">
+                      <a:schemeClr val="tx1">
+                        <a:lumMod val="85000"/>
+                      </a:schemeClr>
+                    </a:gs>
+                  </a:gsLst>
+                  <a:lin ang="5400000" scaled="1"/>
+                </a:gradFill>
+                <a:hlinkClick r:id="rId2" tooltip="" action="ppaction://hlinksldjump"/>
+              </a:rPr>
+              <a:t>https://github.com/ZohraSayyed08/Seasonal-Agriculture-Performance-Analysis</a:t>
             </a:r>
-            <a:endParaRPr lang="en-US" dirty="0"/>
+            <a:endParaRPr lang="en-US" altLang="en-US" dirty="0">
+              <a:gradFill>
+                <a:gsLst>
+                  <a:gs pos="50000">
+                    <a:schemeClr val="tx1"/>
+                  </a:gs>
+                  <a:gs pos="0">
+                    <a:schemeClr val="tx1">
+                      <a:lumMod val="25000"/>
+                      <a:lumOff val="75000"/>
+                    </a:schemeClr>
+                  </a:gs>
+                  <a:gs pos="100000">
+                    <a:schemeClr val="tx1">
+                      <a:lumMod val="85000"/>
+                    </a:schemeClr>
+                  </a:gs>
+                </a:gsLst>
+                <a:lin ang="5400000" scaled="1"/>
+              </a:gradFill>
+              <a:hlinkClick r:id="rId2" tooltip="" action="ppaction://hlinksldjump"/>
+            </a:endParaRPr>
           </a:p>
         </p:txBody>
       </p:sp>
@@ -14683,7 +14725,7 @@
         </p:nvSpPr>
         <p:spPr>
           <a:xfrm>
-            <a:off x="5353508" y="3962573"/>
+            <a:off x="5338268" y="3962573"/>
             <a:ext cx="2596574" cy="453919"/>
           </a:xfrm>
           <a:prstGeom prst="rect">
@@ -15696,32 +15738,6 @@
           </a:prstGeom>
         </p:spPr>
       </p:pic>
-      <p:sp>
-        <p:nvSpPr>
-          <p:cNvPr id="12" name="Text Placeholder 11"/>
-          <p:cNvSpPr>
-            <a:spLocks noGrp="1"/>
-          </p:cNvSpPr>
-          <p:nvPr>
-            <p:ph type="body" sz="quarter" idx="12"/>
-          </p:nvPr>
-        </p:nvSpPr>
-        <p:spPr>
-          <a:xfrm>
-            <a:off x="2975013" y="3962573"/>
-            <a:ext cx="2139696" cy="344312"/>
-          </a:xfrm>
-        </p:spPr>
-        <p:txBody>
-          <a:bodyPr>
-            <a:normAutofit fontScale="92500" lnSpcReduction="20000"/>
-          </a:bodyPr>
-          <a:lstStyle/>
-          <a:p>
-            <a:endParaRPr lang="en-IN" dirty="0"/>
-          </a:p>
-        </p:txBody>
-      </p:sp>
     </p:spTree>
   </p:cSld>
   <p:clrMapOvr>
@@ -16400,10 +16416,6 @@
                 <a:spcPct val="100000"/>
               </a:lnSpc>
             </a:pPr>
-            <a:r>
-              <a:rPr lang="en-IN" sz="2800" dirty="0"/>
-              <a:t>(</a:t>
-            </a:r>
             <a:r>
               <a:rPr lang="en-US" sz="2800" dirty="0"/>
               <a:t>Agricultural activities are influenced by seasonal variations in environmental conditions, farming practices, resource availability and market conditions. As a result, agricultural performance may differ from one season to another. However, raw agricultural data does not clearly explain how agricultural performance changes across seasons or what patterns can be observed in different seasonal conditions. The problem is to analyze the given agricultural dataset and investigate seasonal differences in agricultural performance by identifying meaningful patterns, trends, relationships and variations within the available data.</a:t>
